--- a/dist/초5/영어/이해와읽기/초5_영어_이해와읽기_02_세부정보찾기.pptx
+++ b/dist/초5/영어/이해와읽기/초5_영어_이해와읽기_02_세부정보찾기.pptx
@@ -120,33 +120,33 @@
   <p:extLst>
     <p:ext uri="{521415D9-36F7-43E2-AB2F-B90AF26B5E84}">
       <p14:sectionLst xmlns:p14="http://schemas.microsoft.com/office/powerpoint/2010/main">
-        <p14:section name="도입" id="{473ba202-59d2-3447-4c86-072d66a334dc}">
+        <p14:section name="도입" id="{bf38b50d-cffa-3259-d729-55e1f15e1312}">
           <p14:sldIdLst>
             <p14:sldId id="256"/>
             <p14:sldId id="257"/>
           </p14:sldIdLst>
         </p14:section>
-        <p14:section name="개념" id="{c62f5a80-3fe4-3dc0-5b33-7b283e169ba7}">
+        <p14:section name="개념" id="{768de648-cb88-64ff-802b-085b4ecdad68}">
           <p14:sldIdLst>
             <p14:sldId id="258"/>
             <p14:sldId id="259"/>
             <p14:sldId id="262"/>
           </p14:sldIdLst>
         </p14:section>
-        <p14:section name="연습" id="{5fd4cb48-68fe-5db6-f93f-a92b1eba9c43}">
+        <p14:section name="연습" id="{36e15b79-107c-eb71-b788-e7a3785da239}">
           <p14:sldIdLst>
             <p14:sldId id="260"/>
             <p14:sldId id="261"/>
             <p14:sldId id="263"/>
           </p14:sldIdLst>
         </p14:section>
-        <p14:section name="개념" id="{d2755494-b122-eb2b-f3f0-f801a33f49e0}">
+        <p14:section name="개념" id="{84910d0b-4df7-e353-41de-270f4ad0a8fc}">
           <p14:sldIdLst/>
         </p14:section>
-        <p14:section name="연습" id="{525fc19c-4f28-2f7c-5c13-e77a77041753}">
+        <p14:section name="연습" id="{3a5816fa-af0d-691d-637a-6484b71726d5}">
           <p14:sldIdLst/>
         </p14:section>
-        <p14:section name="확인" id="{41f5d99e-e341-7d07-b4cf-8a021148cb96}">
+        <p14:section name="확인" id="{e6d718f9-e7dd-b72e-caf2-d73fd812a6d1}">
           <p14:sldIdLst>
             <p14:sldId id="264"/>
             <p14:sldId id="265"/>
@@ -154,12 +154,12 @@
             <p14:sldId id="267"/>
           </p14:sldIdLst>
         </p14:section>
-        <p14:section name="정리" id="{0f45614e-08f4-2518-6a52-e3bdd7fa0d35}">
+        <p14:section name="정리" id="{f6fee5a6-a312-3ac1-1357-c841eb582504}">
           <p14:sldIdLst>
             <p14:sldId id="268"/>
           </p14:sldIdLst>
         </p14:section>
-        <p14:section name="보충" id="{18d2f574-4830-4340-f2b8-b3553ba38d4e}">
+        <p14:section name="보충" id="{906f4b20-6c03-b8f9-e5ae-299e87918c3b}">
           <p14:sldIdLst>
             <p14:sldId id="269"/>
           </p14:sldIdLst>
